--- a/alembic_merged.pptx
+++ b/alembic_merged.pptx
@@ -54,7 +54,7 @@
         <p:spPr>
           <a:xfrm>
             <a:off x="360000" y="225720"/>
-            <a:ext cx="9359640" cy="718560"/>
+            <a:ext cx="9359280" cy="718200"/>
           </a:xfrm>
           <a:prstGeom prst="rect">
             <a:avLst/>
@@ -94,7 +94,7 @@
         <p:spPr>
           <a:xfrm>
             <a:off x="360000" y="1485000"/>
-            <a:ext cx="9359640" cy="3779640"/>
+            <a:ext cx="9359280" cy="3779280"/>
           </a:xfrm>
           <a:prstGeom prst="rect">
             <a:avLst/>
@@ -158,7 +158,7 @@
         <p:txBody>
           <a:bodyPr/>
           <a:p>
-            <a:fld id="{4B6D742A-840B-4856-8D76-440B7DA8EB78}" type="slidenum">
+            <a:fld id="{F29284EF-04A0-49E5-8C0D-38C9F9D53782}" type="slidenum">
               <a:t>&lt;#&gt;</a:t>
             </a:fld>
           </a:p>
@@ -220,7 +220,7 @@
         <p:spPr>
           <a:xfrm>
             <a:off x="360000" y="225720"/>
-            <a:ext cx="9359640" cy="718560"/>
+            <a:ext cx="9359280" cy="718200"/>
           </a:xfrm>
           <a:prstGeom prst="rect">
             <a:avLst/>
@@ -260,7 +260,7 @@
         <p:spPr>
           <a:xfrm>
             <a:off x="360000" y="1485000"/>
-            <a:ext cx="9359640" cy="3779640"/>
+            <a:ext cx="9359280" cy="3779280"/>
           </a:xfrm>
           <a:prstGeom prst="rect">
             <a:avLst/>
@@ -321,7 +321,7 @@
         <p:txBody>
           <a:bodyPr/>
           <a:p>
-            <a:fld id="{25DF38BF-1209-4FC0-B33D-B8291FFFE4BC}" type="slidenum">
+            <a:fld id="{85E734DE-6CD4-418A-BD65-BAF162A706DE}" type="slidenum">
               <a:t>&lt;#&gt;</a:t>
             </a:fld>
           </a:p>
@@ -379,7 +379,7 @@
         <p:spPr>
           <a:xfrm>
             <a:off x="0" y="5400000"/>
-            <a:ext cx="10079640" cy="269640"/>
+            <a:ext cx="10079280" cy="269280"/>
           </a:xfrm>
           <a:prstGeom prst="rect">
             <a:avLst/>
@@ -429,7 +429,7 @@
         <p:spPr>
           <a:xfrm>
             <a:off x="0" y="0"/>
-            <a:ext cx="10079640" cy="1214640"/>
+            <a:ext cx="10079280" cy="1214280"/>
           </a:xfrm>
           <a:prstGeom prst="rect">
             <a:avLst/>
@@ -479,7 +479,7 @@
         <p:spPr>
           <a:xfrm>
             <a:off x="9315000" y="5175000"/>
-            <a:ext cx="449640" cy="449640"/>
+            <a:ext cx="449280" cy="449280"/>
           </a:xfrm>
           <a:prstGeom prst="ellipse">
             <a:avLst/>
@@ -533,7 +533,7 @@
         <p:spPr>
           <a:xfrm>
             <a:off x="360000" y="225720"/>
-            <a:ext cx="9359640" cy="718560"/>
+            <a:ext cx="9359280" cy="718200"/>
           </a:xfrm>
           <a:prstGeom prst="rect">
             <a:avLst/>
@@ -591,7 +591,7 @@
         <p:spPr>
           <a:xfrm>
             <a:off x="360000" y="1485000"/>
-            <a:ext cx="9359640" cy="3779640"/>
+            <a:ext cx="9359280" cy="3779280"/>
           </a:xfrm>
           <a:prstGeom prst="rect">
             <a:avLst/>
@@ -816,7 +816,7 @@
         <p:spPr>
           <a:xfrm>
             <a:off x="3420000" y="5400000"/>
-            <a:ext cx="3239640" cy="269640"/>
+            <a:ext cx="3239280" cy="269280"/>
           </a:xfrm>
           <a:prstGeom prst="rect">
             <a:avLst/>
@@ -888,7 +888,7 @@
         <p:spPr>
           <a:xfrm>
             <a:off x="9180000" y="5175000"/>
-            <a:ext cx="719640" cy="449640"/>
+            <a:ext cx="719280" cy="449280"/>
           </a:xfrm>
           <a:prstGeom prst="rect">
             <a:avLst/>
@@ -929,7 +929,7 @@
                 <a:tab algn="l" pos="0"/>
               </a:tabLst>
             </a:pPr>
-            <a:fld id="{0B653342-A6A7-4704-B816-B880403C3307}" type="slidenum">
+            <a:fld id="{7315BB90-2DF1-4C11-ADA6-4FDDA47451E4}" type="slidenum">
               <a:rPr b="1" lang="en-US" sz="1800" spc="-1" strike="noStrike">
                 <a:solidFill>
                   <a:srgbClr val="ffffff"/>
@@ -960,7 +960,7 @@
         <p:spPr>
           <a:xfrm>
             <a:off x="360000" y="5400000"/>
-            <a:ext cx="2879640" cy="269640"/>
+            <a:ext cx="2879280" cy="269280"/>
           </a:xfrm>
           <a:prstGeom prst="rect">
             <a:avLst/>
@@ -1042,7 +1042,7 @@
         <p:spPr>
           <a:xfrm>
             <a:off x="0" y="5400000"/>
-            <a:ext cx="10079640" cy="269640"/>
+            <a:ext cx="10079280" cy="269280"/>
           </a:xfrm>
           <a:prstGeom prst="rect">
             <a:avLst/>
@@ -1092,7 +1092,7 @@
         <p:spPr>
           <a:xfrm>
             <a:off x="0" y="0"/>
-            <a:ext cx="10079640" cy="1214640"/>
+            <a:ext cx="10079280" cy="1214280"/>
           </a:xfrm>
           <a:prstGeom prst="rect">
             <a:avLst/>
@@ -1142,7 +1142,7 @@
         <p:spPr>
           <a:xfrm>
             <a:off x="9315000" y="5175000"/>
-            <a:ext cx="449640" cy="449640"/>
+            <a:ext cx="449280" cy="449280"/>
           </a:xfrm>
           <a:prstGeom prst="ellipse">
             <a:avLst/>
@@ -1196,7 +1196,7 @@
         <p:spPr>
           <a:xfrm>
             <a:off x="360000" y="225720"/>
-            <a:ext cx="9359640" cy="718560"/>
+            <a:ext cx="9359280" cy="718200"/>
           </a:xfrm>
           <a:prstGeom prst="rect">
             <a:avLst/>
@@ -1245,7 +1245,7 @@
         <p:spPr>
           <a:xfrm>
             <a:off x="3420000" y="5400000"/>
-            <a:ext cx="3239640" cy="269640"/>
+            <a:ext cx="3239280" cy="269280"/>
           </a:xfrm>
           <a:prstGeom prst="rect">
             <a:avLst/>
@@ -1317,7 +1317,7 @@
         <p:spPr>
           <a:xfrm>
             <a:off x="9180000" y="5175000"/>
-            <a:ext cx="719640" cy="449640"/>
+            <a:ext cx="719280" cy="449280"/>
           </a:xfrm>
           <a:prstGeom prst="rect">
             <a:avLst/>
@@ -1358,7 +1358,7 @@
                 <a:tab algn="l" pos="0"/>
               </a:tabLst>
             </a:pPr>
-            <a:fld id="{A8CF6106-BC7B-470B-A184-C4A0B4BF6554}" type="slidenum">
+            <a:fld id="{75E0D935-A3FA-4DEE-B51A-D4DE41D22F58}" type="slidenum">
               <a:rPr b="1" lang="en-US" sz="1800" spc="-1" strike="noStrike">
                 <a:solidFill>
                   <a:srgbClr val="ffffff"/>
@@ -1389,7 +1389,7 @@
         <p:spPr>
           <a:xfrm>
             <a:off x="360000" y="5400000"/>
-            <a:ext cx="2879640" cy="269640"/>
+            <a:ext cx="2879280" cy="269280"/>
           </a:xfrm>
           <a:prstGeom prst="rect">
             <a:avLst/>
@@ -1700,7 +1700,7 @@
         <p:spPr>
           <a:xfrm>
             <a:off x="360000" y="225720"/>
-            <a:ext cx="9359640" cy="718560"/>
+            <a:ext cx="9359280" cy="718200"/>
           </a:xfrm>
           <a:prstGeom prst="rect">
             <a:avLst/>
@@ -1755,7 +1755,7 @@
         <p:spPr>
           <a:xfrm>
             <a:off x="360000" y="1485000"/>
-            <a:ext cx="9359640" cy="3779640"/>
+            <a:ext cx="9359280" cy="3779280"/>
           </a:xfrm>
           <a:prstGeom prst="rect">
             <a:avLst/>
@@ -1811,7 +1811,7 @@
         <p:txBody>
           <a:bodyPr/>
           <a:p>
-            <a:fld id="{64F00D50-3F3E-41E9-B848-E481E3F1CD5D}" type="slidenum">
+            <a:fld id="{A1C085FE-0D78-46D9-9B17-7F86E8E2BAE6}" type="slidenum">
               <a:t>1</a:t>
             </a:fld>
           </a:p>
@@ -1860,7 +1860,7 @@
         <p:spPr>
           <a:xfrm>
             <a:off x="360000" y="225720"/>
-            <a:ext cx="9359640" cy="718560"/>
+            <a:ext cx="9359280" cy="718200"/>
           </a:xfrm>
           <a:prstGeom prst="rect">
             <a:avLst/>
@@ -1944,7 +1944,7 @@
         <p:spPr>
           <a:xfrm>
             <a:off x="0" y="1828800"/>
-            <a:ext cx="10079280" cy="2679840"/>
+            <a:ext cx="10078920" cy="2679480"/>
           </a:xfrm>
           <a:prstGeom prst="rect">
             <a:avLst/>
@@ -1968,7 +1968,7 @@
         <p:txBody>
           <a:bodyPr/>
           <a:p>
-            <a:fld id="{EC8BB87A-C1FC-4960-B1DC-9E58CBD8A0D0}" type="slidenum">
+            <a:fld id="{EFAFE592-9F1D-427C-A3F9-D87D384F5D98}" type="slidenum">
               <a:t>10</a:t>
             </a:fld>
           </a:p>
@@ -2017,7 +2017,7 @@
         <p:spPr>
           <a:xfrm>
             <a:off x="360000" y="225720"/>
-            <a:ext cx="9359640" cy="718560"/>
+            <a:ext cx="9359280" cy="718200"/>
           </a:xfrm>
           <a:prstGeom prst="rect">
             <a:avLst/>
@@ -2068,7 +2068,7 @@
         <p:spPr>
           <a:xfrm>
             <a:off x="1828800" y="1600200"/>
-            <a:ext cx="6400440" cy="3200040"/>
+            <a:ext cx="6400080" cy="3199680"/>
           </a:xfrm>
           <a:prstGeom prst="rect">
             <a:avLst/>
@@ -2249,7 +2249,7 @@
         <p:txBody>
           <a:bodyPr/>
           <a:p>
-            <a:fld id="{C282EFE1-FD64-4724-B2DF-7047D61F96BD}" type="slidenum">
+            <a:fld id="{46CB970A-F9F8-40BF-A04C-C9DA69482D1A}" type="slidenum">
               <a:t>11</a:t>
             </a:fld>
           </a:p>
@@ -2298,7 +2298,7 @@
         <p:spPr>
           <a:xfrm>
             <a:off x="360000" y="225720"/>
-            <a:ext cx="9359640" cy="718560"/>
+            <a:ext cx="9359280" cy="718200"/>
           </a:xfrm>
           <a:prstGeom prst="rect">
             <a:avLst/>
@@ -2362,7 +2362,7 @@
         <p:spPr>
           <a:xfrm>
             <a:off x="3782160" y="1672560"/>
-            <a:ext cx="2561400" cy="3104280"/>
+            <a:ext cx="2561040" cy="3103920"/>
           </a:xfrm>
           <a:prstGeom prst="rect">
             <a:avLst/>
@@ -2386,7 +2386,7 @@
         <p:txBody>
           <a:bodyPr/>
           <a:p>
-            <a:fld id="{49DB8B0D-6605-4577-A5A0-6BAEFEF5FAE7}" type="slidenum">
+            <a:fld id="{28EDA666-3258-4345-88F8-56A7B1B78E7D}" type="slidenum">
               <a:t>12</a:t>
             </a:fld>
           </a:p>
@@ -2438,7 +2438,7 @@
         <p:spPr>
           <a:xfrm>
             <a:off x="0" y="0"/>
-            <a:ext cx="72720" cy="5143320"/>
+            <a:ext cx="72360" cy="5142960"/>
           </a:xfrm>
           <a:prstGeom prst="rect">
             <a:avLst/>
@@ -2461,11 +2461,17 @@
             <a:noAutofit/>
           </a:bodyPr>
           <a:p>
+            <a:pPr>
+              <a:lnSpc>
+                <a:spcPct val="100000"/>
+              </a:lnSpc>
+            </a:pPr>
             <a:endParaRPr b="0" lang="en-US" sz="1800" spc="-1" strike="noStrike">
               <a:solidFill>
                 <a:srgbClr val="000000"/>
               </a:solidFill>
               <a:latin typeface="Arial"/>
+              <a:ea typeface="DejaVu Sans"/>
             </a:endParaRPr>
           </a:p>
         </p:txBody>
@@ -2483,7 +2489,7 @@
         <p:spPr>
           <a:xfrm>
             <a:off x="274680" y="274680"/>
-            <a:ext cx="639720" cy="639720"/>
+            <a:ext cx="639360" cy="639360"/>
           </a:xfrm>
           <a:prstGeom prst="rect">
             <a:avLst/>
@@ -2502,7 +2508,7 @@
         <p:spPr>
           <a:xfrm>
             <a:off x="1143000" y="228600"/>
-            <a:ext cx="6172200" cy="822600"/>
+            <a:ext cx="6171840" cy="822240"/>
           </a:xfrm>
           <a:prstGeom prst="rect">
             <a:avLst/>
@@ -2545,7 +2551,7 @@
               <a:solidFill>
                 <a:srgbClr val="ffffff"/>
               </a:solidFill>
-              <a:latin typeface="Noto Sans"/>
+              <a:latin typeface="Arial"/>
             </a:endParaRPr>
           </a:p>
         </p:txBody>
@@ -2559,7 +2565,7 @@
         <p:spPr>
           <a:xfrm>
             <a:off x="1143000" y="1234440"/>
-            <a:ext cx="6720480" cy="456840"/>
+            <a:ext cx="6720120" cy="456480"/>
           </a:xfrm>
           <a:prstGeom prst="rect">
             <a:avLst/>
@@ -2616,7 +2622,7 @@
         <p:spPr>
           <a:xfrm>
             <a:off x="640080" y="2011680"/>
-            <a:ext cx="3748680" cy="1371240"/>
+            <a:ext cx="3748320" cy="1370880"/>
           </a:xfrm>
           <a:prstGeom prst="roundRect">
             <a:avLst>
@@ -2648,11 +2654,17 @@
             <a:noAutofit/>
           </a:bodyPr>
           <a:p>
+            <a:pPr>
+              <a:lnSpc>
+                <a:spcPct val="100000"/>
+              </a:lnSpc>
+            </a:pPr>
             <a:endParaRPr b="0" lang="en-US" sz="1800" spc="-1" strike="noStrike">
               <a:solidFill>
                 <a:srgbClr val="ffffff"/>
               </a:solidFill>
               <a:latin typeface="Arial"/>
+              <a:ea typeface="DejaVu Sans"/>
             </a:endParaRPr>
           </a:p>
         </p:txBody>
@@ -2666,7 +2678,7 @@
         <p:spPr>
           <a:xfrm>
             <a:off x="914400" y="2194560"/>
-            <a:ext cx="3200040" cy="365400"/>
+            <a:ext cx="3199680" cy="365040"/>
           </a:xfrm>
           <a:prstGeom prst="rect">
             <a:avLst/>
@@ -2723,7 +2735,7 @@
         <p:spPr>
           <a:xfrm>
             <a:off x="914400" y="2606040"/>
-            <a:ext cx="3200040" cy="685440"/>
+            <a:ext cx="3199680" cy="685080"/>
           </a:xfrm>
           <a:prstGeom prst="rect">
             <a:avLst/>
@@ -2806,7 +2818,7 @@
         <p:spPr>
           <a:xfrm>
             <a:off x="4754880" y="2011680"/>
-            <a:ext cx="3748680" cy="1371240"/>
+            <a:ext cx="3748320" cy="1370880"/>
           </a:xfrm>
           <a:prstGeom prst="roundRect">
             <a:avLst>
@@ -2838,11 +2850,17 @@
             <a:noAutofit/>
           </a:bodyPr>
           <a:p>
+            <a:pPr>
+              <a:lnSpc>
+                <a:spcPct val="100000"/>
+              </a:lnSpc>
+            </a:pPr>
             <a:endParaRPr b="0" lang="en-US" sz="1800" spc="-1" strike="noStrike">
               <a:solidFill>
                 <a:srgbClr val="ffffff"/>
               </a:solidFill>
               <a:latin typeface="Arial"/>
+              <a:ea typeface="DejaVu Sans"/>
             </a:endParaRPr>
           </a:p>
         </p:txBody>
@@ -2856,7 +2874,7 @@
         <p:spPr>
           <a:xfrm>
             <a:off x="5029200" y="2194560"/>
-            <a:ext cx="3200040" cy="365400"/>
+            <a:ext cx="3199680" cy="365040"/>
           </a:xfrm>
           <a:prstGeom prst="rect">
             <a:avLst/>
@@ -2913,7 +2931,7 @@
         <p:spPr>
           <a:xfrm>
             <a:off x="5029200" y="2606040"/>
-            <a:ext cx="3200040" cy="685440"/>
+            <a:ext cx="3199680" cy="685080"/>
           </a:xfrm>
           <a:prstGeom prst="rect">
             <a:avLst/>
@@ -2996,7 +3014,7 @@
         <p:spPr>
           <a:xfrm>
             <a:off x="640080" y="3703320"/>
-            <a:ext cx="3748680" cy="1371240"/>
+            <a:ext cx="3748320" cy="1370880"/>
           </a:xfrm>
           <a:prstGeom prst="roundRect">
             <a:avLst>
@@ -3028,11 +3046,17 @@
             <a:noAutofit/>
           </a:bodyPr>
           <a:p>
+            <a:pPr>
+              <a:lnSpc>
+                <a:spcPct val="100000"/>
+              </a:lnSpc>
+            </a:pPr>
             <a:endParaRPr b="0" lang="en-US" sz="1800" spc="-1" strike="noStrike">
               <a:solidFill>
                 <a:srgbClr val="ffffff"/>
               </a:solidFill>
               <a:latin typeface="Arial"/>
+              <a:ea typeface="DejaVu Sans"/>
             </a:endParaRPr>
           </a:p>
         </p:txBody>
@@ -3046,7 +3070,7 @@
         <p:spPr>
           <a:xfrm>
             <a:off x="914400" y="3886200"/>
-            <a:ext cx="3200040" cy="365400"/>
+            <a:ext cx="3199680" cy="365040"/>
           </a:xfrm>
           <a:prstGeom prst="rect">
             <a:avLst/>
@@ -3103,7 +3127,7 @@
         <p:spPr>
           <a:xfrm>
             <a:off x="914400" y="4297680"/>
-            <a:ext cx="3200040" cy="685440"/>
+            <a:ext cx="3199680" cy="685080"/>
           </a:xfrm>
           <a:prstGeom prst="rect">
             <a:avLst/>
@@ -3186,7 +3210,7 @@
         <p:spPr>
           <a:xfrm>
             <a:off x="4754880" y="3703320"/>
-            <a:ext cx="3748680" cy="1371240"/>
+            <a:ext cx="3748320" cy="1370880"/>
           </a:xfrm>
           <a:prstGeom prst="roundRect">
             <a:avLst>
@@ -3218,11 +3242,17 @@
             <a:noAutofit/>
           </a:bodyPr>
           <a:p>
+            <a:pPr>
+              <a:lnSpc>
+                <a:spcPct val="100000"/>
+              </a:lnSpc>
+            </a:pPr>
             <a:endParaRPr b="0" lang="en-US" sz="1800" spc="-1" strike="noStrike">
               <a:solidFill>
                 <a:srgbClr val="ffffff"/>
               </a:solidFill>
               <a:latin typeface="Arial"/>
+              <a:ea typeface="DejaVu Sans"/>
             </a:endParaRPr>
           </a:p>
         </p:txBody>
@@ -3236,7 +3266,7 @@
         <p:spPr>
           <a:xfrm>
             <a:off x="5029200" y="3886200"/>
-            <a:ext cx="3200040" cy="365400"/>
+            <a:ext cx="3199680" cy="365040"/>
           </a:xfrm>
           <a:prstGeom prst="rect">
             <a:avLst/>
@@ -3293,7 +3323,7 @@
         <p:spPr>
           <a:xfrm>
             <a:off x="5029200" y="4297680"/>
-            <a:ext cx="3200040" cy="685440"/>
+            <a:ext cx="3199680" cy="685080"/>
           </a:xfrm>
           <a:prstGeom prst="rect">
             <a:avLst/>
@@ -3413,7 +3443,7 @@
         <p:spPr>
           <a:xfrm>
             <a:off x="0" y="0"/>
-            <a:ext cx="72720" cy="5143320"/>
+            <a:ext cx="72360" cy="5142960"/>
           </a:xfrm>
           <a:prstGeom prst="rect">
             <a:avLst/>
@@ -3436,11 +3466,17 @@
             <a:noAutofit/>
           </a:bodyPr>
           <a:p>
+            <a:pPr>
+              <a:lnSpc>
+                <a:spcPct val="100000"/>
+              </a:lnSpc>
+            </a:pPr>
             <a:endParaRPr b="0" lang="en-US" sz="1800" spc="-1" strike="noStrike">
               <a:solidFill>
                 <a:srgbClr val="ffffff"/>
               </a:solidFill>
               <a:latin typeface="Arial"/>
+              <a:ea typeface="DejaVu Sans"/>
             </a:endParaRPr>
           </a:p>
         </p:txBody>
@@ -3458,7 +3494,7 @@
         <p:spPr>
           <a:xfrm>
             <a:off x="274680" y="274680"/>
-            <a:ext cx="639720" cy="639720"/>
+            <a:ext cx="639360" cy="639360"/>
           </a:xfrm>
           <a:prstGeom prst="rect">
             <a:avLst/>
@@ -3477,7 +3513,7 @@
         <p:spPr>
           <a:xfrm>
             <a:off x="1143000" y="228600"/>
-            <a:ext cx="6400440" cy="822600"/>
+            <a:ext cx="6400080" cy="822240"/>
           </a:xfrm>
           <a:prstGeom prst="rect">
             <a:avLst/>
@@ -3534,7 +3570,7 @@
         <p:spPr>
           <a:xfrm>
             <a:off x="1143360" y="1234440"/>
-            <a:ext cx="6400440" cy="456840"/>
+            <a:ext cx="6400080" cy="456480"/>
           </a:xfrm>
           <a:prstGeom prst="rect">
             <a:avLst/>
@@ -3591,7 +3627,7 @@
         <p:spPr>
           <a:xfrm>
             <a:off x="640080" y="2011680"/>
-            <a:ext cx="3748680" cy="1371240"/>
+            <a:ext cx="3748320" cy="1370880"/>
           </a:xfrm>
           <a:prstGeom prst="roundRect">
             <a:avLst>
@@ -3623,11 +3659,17 @@
             <a:noAutofit/>
           </a:bodyPr>
           <a:p>
+            <a:pPr>
+              <a:lnSpc>
+                <a:spcPct val="100000"/>
+              </a:lnSpc>
+            </a:pPr>
             <a:endParaRPr b="0" lang="en-US" sz="1800" spc="-1" strike="noStrike">
               <a:solidFill>
                 <a:srgbClr val="ffffff"/>
               </a:solidFill>
               <a:latin typeface="Arial"/>
+              <a:ea typeface="DejaVu Sans"/>
             </a:endParaRPr>
           </a:p>
         </p:txBody>
@@ -3641,7 +3683,7 @@
         <p:spPr>
           <a:xfrm>
             <a:off x="914400" y="2194560"/>
-            <a:ext cx="3200040" cy="365400"/>
+            <a:ext cx="3199680" cy="365040"/>
           </a:xfrm>
           <a:prstGeom prst="rect">
             <a:avLst/>
@@ -3698,7 +3740,7 @@
         <p:spPr>
           <a:xfrm>
             <a:off x="914400" y="2606040"/>
-            <a:ext cx="3200040" cy="685440"/>
+            <a:ext cx="3199680" cy="685080"/>
           </a:xfrm>
           <a:prstGeom prst="rect">
             <a:avLst/>
@@ -3781,7 +3823,7 @@
         <p:spPr>
           <a:xfrm>
             <a:off x="4754880" y="2011680"/>
-            <a:ext cx="3748680" cy="1371240"/>
+            <a:ext cx="3748320" cy="1370880"/>
           </a:xfrm>
           <a:prstGeom prst="roundRect">
             <a:avLst>
@@ -3813,11 +3855,17 @@
             <a:noAutofit/>
           </a:bodyPr>
           <a:p>
+            <a:pPr>
+              <a:lnSpc>
+                <a:spcPct val="100000"/>
+              </a:lnSpc>
+            </a:pPr>
             <a:endParaRPr b="0" lang="en-US" sz="1800" spc="-1" strike="noStrike">
               <a:solidFill>
                 <a:srgbClr val="ffffff"/>
               </a:solidFill>
               <a:latin typeface="Arial"/>
+              <a:ea typeface="DejaVu Sans"/>
             </a:endParaRPr>
           </a:p>
         </p:txBody>
@@ -3831,7 +3879,7 @@
         <p:spPr>
           <a:xfrm>
             <a:off x="5029200" y="2194560"/>
-            <a:ext cx="3200040" cy="365400"/>
+            <a:ext cx="3199680" cy="365040"/>
           </a:xfrm>
           <a:prstGeom prst="rect">
             <a:avLst/>
@@ -3888,7 +3936,7 @@
         <p:spPr>
           <a:xfrm>
             <a:off x="5029200" y="2606040"/>
-            <a:ext cx="3200040" cy="685440"/>
+            <a:ext cx="3199680" cy="685080"/>
           </a:xfrm>
           <a:prstGeom prst="rect">
             <a:avLst/>
@@ -3971,7 +4019,7 @@
         <p:spPr>
           <a:xfrm>
             <a:off x="640080" y="3703320"/>
-            <a:ext cx="3748680" cy="1371240"/>
+            <a:ext cx="3748320" cy="1370880"/>
           </a:xfrm>
           <a:prstGeom prst="roundRect">
             <a:avLst>
@@ -4003,11 +4051,17 @@
             <a:noAutofit/>
           </a:bodyPr>
           <a:p>
+            <a:pPr>
+              <a:lnSpc>
+                <a:spcPct val="100000"/>
+              </a:lnSpc>
+            </a:pPr>
             <a:endParaRPr b="0" lang="en-US" sz="1800" spc="-1" strike="noStrike">
               <a:solidFill>
                 <a:srgbClr val="ffffff"/>
               </a:solidFill>
               <a:latin typeface="Arial"/>
+              <a:ea typeface="DejaVu Sans"/>
             </a:endParaRPr>
           </a:p>
         </p:txBody>
@@ -4021,7 +4075,7 @@
         <p:spPr>
           <a:xfrm>
             <a:off x="914400" y="3886200"/>
-            <a:ext cx="3200040" cy="365400"/>
+            <a:ext cx="3199680" cy="365040"/>
           </a:xfrm>
           <a:prstGeom prst="rect">
             <a:avLst/>
@@ -4078,7 +4132,7 @@
         <p:spPr>
           <a:xfrm>
             <a:off x="914400" y="4297680"/>
-            <a:ext cx="3200040" cy="685440"/>
+            <a:ext cx="3199680" cy="685080"/>
           </a:xfrm>
           <a:prstGeom prst="rect">
             <a:avLst/>
@@ -4161,7 +4215,7 @@
         <p:spPr>
           <a:xfrm>
             <a:off x="4754880" y="3703320"/>
-            <a:ext cx="3748680" cy="1371240"/>
+            <a:ext cx="3748320" cy="1370880"/>
           </a:xfrm>
           <a:prstGeom prst="roundRect">
             <a:avLst>
@@ -4193,11 +4247,17 @@
             <a:noAutofit/>
           </a:bodyPr>
           <a:p>
+            <a:pPr>
+              <a:lnSpc>
+                <a:spcPct val="100000"/>
+              </a:lnSpc>
+            </a:pPr>
             <a:endParaRPr b="0" lang="en-US" sz="1800" spc="-1" strike="noStrike">
               <a:solidFill>
                 <a:srgbClr val="ffffff"/>
               </a:solidFill>
               <a:latin typeface="Arial"/>
+              <a:ea typeface="DejaVu Sans"/>
             </a:endParaRPr>
           </a:p>
         </p:txBody>
@@ -4211,7 +4271,7 @@
         <p:spPr>
           <a:xfrm>
             <a:off x="5029200" y="3886200"/>
-            <a:ext cx="3200040" cy="365400"/>
+            <a:ext cx="3199680" cy="365040"/>
           </a:xfrm>
           <a:prstGeom prst="rect">
             <a:avLst/>
@@ -4268,7 +4328,7 @@
         <p:spPr>
           <a:xfrm>
             <a:off x="5029200" y="4297680"/>
-            <a:ext cx="3200040" cy="685440"/>
+            <a:ext cx="3199680" cy="685080"/>
           </a:xfrm>
           <a:prstGeom prst="rect">
             <a:avLst/>
@@ -4388,7 +4448,7 @@
         <p:spPr>
           <a:xfrm>
             <a:off x="0" y="0"/>
-            <a:ext cx="72720" cy="5143320"/>
+            <a:ext cx="72360" cy="5142960"/>
           </a:xfrm>
           <a:prstGeom prst="rect">
             <a:avLst/>
@@ -4411,11 +4471,17 @@
             <a:noAutofit/>
           </a:bodyPr>
           <a:p>
+            <a:pPr>
+              <a:lnSpc>
+                <a:spcPct val="100000"/>
+              </a:lnSpc>
+            </a:pPr>
             <a:endParaRPr b="0" lang="en-US" sz="1800" spc="-1" strike="noStrike">
               <a:solidFill>
                 <a:srgbClr val="000000"/>
               </a:solidFill>
               <a:latin typeface="Arial"/>
+              <a:ea typeface="DejaVu Sans"/>
             </a:endParaRPr>
           </a:p>
         </p:txBody>
@@ -4433,7 +4499,7 @@
         <p:spPr>
           <a:xfrm>
             <a:off x="274680" y="274680"/>
-            <a:ext cx="639720" cy="639720"/>
+            <a:ext cx="639360" cy="639360"/>
           </a:xfrm>
           <a:prstGeom prst="rect">
             <a:avLst/>
@@ -4452,7 +4518,7 @@
         <p:spPr>
           <a:xfrm>
             <a:off x="1143000" y="228600"/>
-            <a:ext cx="6172200" cy="822600"/>
+            <a:ext cx="6171840" cy="822240"/>
           </a:xfrm>
           <a:prstGeom prst="rect">
             <a:avLst/>
@@ -4509,7 +4575,7 @@
         <p:spPr>
           <a:xfrm>
             <a:off x="1143000" y="1234440"/>
-            <a:ext cx="6720480" cy="456840"/>
+            <a:ext cx="6720120" cy="456480"/>
           </a:xfrm>
           <a:prstGeom prst="rect">
             <a:avLst/>
@@ -4566,7 +4632,7 @@
         <p:spPr>
           <a:xfrm>
             <a:off x="640080" y="2011680"/>
-            <a:ext cx="3748680" cy="1371240"/>
+            <a:ext cx="3748320" cy="1370880"/>
           </a:xfrm>
           <a:prstGeom prst="roundRect">
             <a:avLst>
@@ -4598,11 +4664,17 @@
             <a:noAutofit/>
           </a:bodyPr>
           <a:p>
+            <a:pPr>
+              <a:lnSpc>
+                <a:spcPct val="100000"/>
+              </a:lnSpc>
+            </a:pPr>
             <a:endParaRPr b="0" lang="en-US" sz="1800" spc="-1" strike="noStrike">
               <a:solidFill>
                 <a:srgbClr val="ffffff"/>
               </a:solidFill>
               <a:latin typeface="Arial"/>
+              <a:ea typeface="DejaVu Sans"/>
             </a:endParaRPr>
           </a:p>
         </p:txBody>
@@ -4616,7 +4688,7 @@
         <p:spPr>
           <a:xfrm>
             <a:off x="914400" y="2194560"/>
-            <a:ext cx="3200040" cy="365400"/>
+            <a:ext cx="3199680" cy="365040"/>
           </a:xfrm>
           <a:prstGeom prst="rect">
             <a:avLst/>
@@ -4673,7 +4745,7 @@
         <p:spPr>
           <a:xfrm>
             <a:off x="914400" y="2606040"/>
-            <a:ext cx="3200040" cy="685440"/>
+            <a:ext cx="3199680" cy="685080"/>
           </a:xfrm>
           <a:prstGeom prst="rect">
             <a:avLst/>
@@ -4756,7 +4828,7 @@
         <p:spPr>
           <a:xfrm>
             <a:off x="4754880" y="2011680"/>
-            <a:ext cx="3748680" cy="1371240"/>
+            <a:ext cx="3748320" cy="1370880"/>
           </a:xfrm>
           <a:prstGeom prst="roundRect">
             <a:avLst>
@@ -4788,11 +4860,17 @@
             <a:noAutofit/>
           </a:bodyPr>
           <a:p>
+            <a:pPr>
+              <a:lnSpc>
+                <a:spcPct val="100000"/>
+              </a:lnSpc>
+            </a:pPr>
             <a:endParaRPr b="0" lang="en-US" sz="1800" spc="-1" strike="noStrike">
               <a:solidFill>
                 <a:srgbClr val="ffffff"/>
               </a:solidFill>
               <a:latin typeface="Arial"/>
+              <a:ea typeface="DejaVu Sans"/>
             </a:endParaRPr>
           </a:p>
         </p:txBody>
@@ -4806,7 +4884,7 @@
         <p:spPr>
           <a:xfrm>
             <a:off x="5029200" y="2194560"/>
-            <a:ext cx="3200040" cy="365400"/>
+            <a:ext cx="3199680" cy="365040"/>
           </a:xfrm>
           <a:prstGeom prst="rect">
             <a:avLst/>
@@ -4863,7 +4941,7 @@
         <p:spPr>
           <a:xfrm>
             <a:off x="5029200" y="2606040"/>
-            <a:ext cx="3200040" cy="685440"/>
+            <a:ext cx="3199680" cy="685080"/>
           </a:xfrm>
           <a:prstGeom prst="rect">
             <a:avLst/>
@@ -4946,7 +5024,7 @@
         <p:spPr>
           <a:xfrm>
             <a:off x="640080" y="3703320"/>
-            <a:ext cx="3748680" cy="1371240"/>
+            <a:ext cx="3748320" cy="1370880"/>
           </a:xfrm>
           <a:prstGeom prst="roundRect">
             <a:avLst>
@@ -4978,11 +5056,17 @@
             <a:noAutofit/>
           </a:bodyPr>
           <a:p>
+            <a:pPr>
+              <a:lnSpc>
+                <a:spcPct val="100000"/>
+              </a:lnSpc>
+            </a:pPr>
             <a:endParaRPr b="0" lang="en-US" sz="1800" spc="-1" strike="noStrike">
               <a:solidFill>
                 <a:srgbClr val="ffffff"/>
               </a:solidFill>
               <a:latin typeface="Arial"/>
+              <a:ea typeface="DejaVu Sans"/>
             </a:endParaRPr>
           </a:p>
         </p:txBody>
@@ -4996,7 +5080,7 @@
         <p:spPr>
           <a:xfrm>
             <a:off x="914400" y="3886200"/>
-            <a:ext cx="3200040" cy="365400"/>
+            <a:ext cx="3199680" cy="365040"/>
           </a:xfrm>
           <a:prstGeom prst="rect">
             <a:avLst/>
@@ -5053,7 +5137,7 @@
         <p:spPr>
           <a:xfrm>
             <a:off x="914400" y="4297680"/>
-            <a:ext cx="3200040" cy="685440"/>
+            <a:ext cx="3199680" cy="685080"/>
           </a:xfrm>
           <a:prstGeom prst="rect">
             <a:avLst/>
@@ -5136,7 +5220,7 @@
         <p:spPr>
           <a:xfrm>
             <a:off x="4754880" y="3703320"/>
-            <a:ext cx="3748680" cy="1371240"/>
+            <a:ext cx="3748320" cy="1370880"/>
           </a:xfrm>
           <a:prstGeom prst="roundRect">
             <a:avLst>
@@ -5168,11 +5252,17 @@
             <a:noAutofit/>
           </a:bodyPr>
           <a:p>
+            <a:pPr>
+              <a:lnSpc>
+                <a:spcPct val="100000"/>
+              </a:lnSpc>
+            </a:pPr>
             <a:endParaRPr b="0" lang="en-US" sz="1800" spc="-1" strike="noStrike">
               <a:solidFill>
                 <a:srgbClr val="ffffff"/>
               </a:solidFill>
               <a:latin typeface="Arial"/>
+              <a:ea typeface="DejaVu Sans"/>
             </a:endParaRPr>
           </a:p>
         </p:txBody>
@@ -5186,7 +5276,7 @@
         <p:spPr>
           <a:xfrm>
             <a:off x="5029200" y="3886200"/>
-            <a:ext cx="3200040" cy="365400"/>
+            <a:ext cx="3199680" cy="365040"/>
           </a:xfrm>
           <a:prstGeom prst="rect">
             <a:avLst/>
@@ -5243,7 +5333,7 @@
         <p:spPr>
           <a:xfrm>
             <a:off x="5029200" y="4297680"/>
-            <a:ext cx="3200040" cy="685440"/>
+            <a:ext cx="3199680" cy="685080"/>
           </a:xfrm>
           <a:prstGeom prst="rect">
             <a:avLst/>
@@ -5360,7 +5450,7 @@
         <p:spPr>
           <a:xfrm>
             <a:off x="360000" y="225720"/>
-            <a:ext cx="9359640" cy="718560"/>
+            <a:ext cx="9359280" cy="718200"/>
           </a:xfrm>
           <a:prstGeom prst="rect">
             <a:avLst/>
@@ -6188,7 +6278,7 @@
         <p:txBody>
           <a:bodyPr/>
           <a:p>
-            <a:fld id="{2B71921D-25E5-40AA-88E3-20D4EB5B40FA}" type="slidenum">
+            <a:fld id="{91934FBB-EEBC-4D08-A367-CE03CFCFBBCA}" type="slidenum">
               <a:t>5</a:t>
             </a:fld>
           </a:p>
@@ -6237,7 +6327,7 @@
         <p:spPr>
           <a:xfrm>
             <a:off x="360000" y="225720"/>
-            <a:ext cx="9359640" cy="718560"/>
+            <a:ext cx="9359280" cy="718200"/>
           </a:xfrm>
           <a:prstGeom prst="rect">
             <a:avLst/>
@@ -6298,7 +6388,7 @@
         <p:spPr>
           <a:xfrm>
             <a:off x="1400400" y="1321560"/>
-            <a:ext cx="7514640" cy="3935880"/>
+            <a:ext cx="7514280" cy="3935520"/>
           </a:xfrm>
           <a:prstGeom prst="rect">
             <a:avLst/>
@@ -6322,7 +6412,7 @@
         <p:txBody>
           <a:bodyPr/>
           <a:p>
-            <a:fld id="{67E9FDF5-5052-4F1A-83C5-4BC0B6923BCB}" type="slidenum">
+            <a:fld id="{9F0C3FA1-EA1C-4FCA-90E2-6C6749181744}" type="slidenum">
               <a:t>6</a:t>
             </a:fld>
           </a:p>
@@ -6371,7 +6461,7 @@
         <p:spPr>
           <a:xfrm>
             <a:off x="360000" y="225720"/>
-            <a:ext cx="9359640" cy="718560"/>
+            <a:ext cx="9359280" cy="718200"/>
           </a:xfrm>
           <a:prstGeom prst="rect">
             <a:avLst/>
@@ -6432,7 +6522,7 @@
         <p:spPr>
           <a:xfrm>
             <a:off x="1095840" y="1495800"/>
-            <a:ext cx="8047800" cy="3533040"/>
+            <a:ext cx="8047440" cy="3532680"/>
           </a:xfrm>
           <a:prstGeom prst="rect">
             <a:avLst/>
@@ -6456,7 +6546,7 @@
         <p:txBody>
           <a:bodyPr/>
           <a:p>
-            <a:fld id="{BDB0DC52-4E97-4D20-B748-282AB18CF581}" type="slidenum">
+            <a:fld id="{CA6AEEA6-7EF4-4B8F-8666-C6B1930FC8FC}" type="slidenum">
               <a:t>7</a:t>
             </a:fld>
           </a:p>
@@ -6505,7 +6595,7 @@
         <p:spPr>
           <a:xfrm>
             <a:off x="360000" y="225720"/>
-            <a:ext cx="9359640" cy="718560"/>
+            <a:ext cx="9359280" cy="718200"/>
           </a:xfrm>
           <a:prstGeom prst="rect">
             <a:avLst/>
@@ -6560,7 +6650,7 @@
         <p:spPr>
           <a:xfrm>
             <a:off x="360000" y="1485000"/>
-            <a:ext cx="9359640" cy="3779640"/>
+            <a:ext cx="9359280" cy="3779280"/>
           </a:xfrm>
           <a:prstGeom prst="rect">
             <a:avLst/>
@@ -6832,7 +6922,7 @@
         <p:txBody>
           <a:bodyPr/>
           <a:p>
-            <a:fld id="{2672047A-A949-4451-A211-DC8C501A2680}" type="slidenum">
+            <a:fld id="{5D76E4D9-E1F3-4FA0-9D64-9EEA184EDA49}" type="slidenum">
               <a:t>8</a:t>
             </a:fld>
           </a:p>
@@ -6881,7 +6971,7 @@
         <p:spPr>
           <a:xfrm>
             <a:off x="360000" y="225720"/>
-            <a:ext cx="9359640" cy="718560"/>
+            <a:ext cx="9359280" cy="718200"/>
           </a:xfrm>
           <a:prstGeom prst="rect">
             <a:avLst/>
@@ -6936,7 +7026,7 @@
         <p:spPr>
           <a:xfrm>
             <a:off x="2177640" y="1868040"/>
-            <a:ext cx="5770440" cy="2713320"/>
+            <a:ext cx="5770080" cy="2712960"/>
           </a:xfrm>
           <a:prstGeom prst="rect">
             <a:avLst/>
@@ -6960,7 +7050,7 @@
         <p:txBody>
           <a:bodyPr/>
           <a:p>
-            <a:fld id="{1C88C189-025E-415A-93FE-640FF17168D2}" type="slidenum">
+            <a:fld id="{E032F43D-2E63-444E-936A-EC2812E12815}" type="slidenum">
               <a:t>9</a:t>
             </a:fld>
           </a:p>
